--- a/decks/triple-space/triple-space_ch5_exam-skills.pptx
+++ b/decks/triple-space/triple-space_ch5_exam-skills.pptx
@@ -125,28 +125,28 @@
   <p:extLst>
     <p:ext uri="{521415D9-36F7-43E2-AB2F-B90AF26B5E84}">
       <p14:sectionLst xmlns:p14="http://schemas.microsoft.com/office/powerpoint/2010/main">
-        <p14:section name="Opening" id="{5a0c8f95-0839-8b08-291c-2073abadc55c}">
+        <p14:section name="Opening" id="{36145714-412b-3a4e-d714-4db0054ce224}">
           <p14:sldIdLst>
             <p14:sldId id="256"/>
           </p14:sldIdLst>
         </p14:section>
-        <p14:section name="Gate" id="{61b4b92a-7b0d-6664-865f-df126b2eb515}">
+        <p14:section name="Gate" id="{67b1d78e-7a6b-09d4-294f-addf40f306f9}">
           <p14:sldIdLst>
             <p14:sldId id="257"/>
             <p14:sldId id="258"/>
           </p14:sldIdLst>
         </p14:section>
-        <p14:section name="Pre-teach" id="{5f7b56b3-4b8c-6d2e-a078-a8b0631c7965}">
+        <p14:section name="Pre-teach" id="{92d7c1e3-fb2f-d7bc-b8ee-3ab631e195fb}">
           <p14:sldIdLst>
             <p14:sldId id="259"/>
           </p14:sldIdLst>
         </p14:section>
-        <p14:section name="Read-along" id="{c5b0c007-7841-0e53-0526-6f3f5de901fb}">
+        <p14:section name="Read-along" id="{2154be09-aa08-3de5-1d61-cef123346421}">
           <p14:sldIdLst>
             <p14:sldId id="260"/>
           </p14:sldIdLst>
         </p14:section>
-        <p14:section name="Teach" id="{2829c5c3-cad7-8f32-94de-047343b7e2a1}">
+        <p14:section name="Teach" id="{f3894346-1bb0-b796-fb68-9f2f2d697768}">
           <p14:sldIdLst>
             <p14:sldId id="261"/>
             <p14:sldId id="262"/>
@@ -154,7 +154,7 @@
             <p14:sldId id="264"/>
           </p14:sldIdLst>
         </p14:section>
-        <p14:section name="Routes" id="{d4779566-8814-ccdc-9150-9a4b91289884}">
+        <p14:section name="Routes" id="{310b65d8-589b-3d42-6216-deafb5e85a97}">
           <p14:sldIdLst>
             <p14:sldId id="265"/>
             <p14:sldId id="266"/>
@@ -162,12 +162,12 @@
             <p14:sldId id="268"/>
           </p14:sldIdLst>
         </p14:section>
-        <p14:section name="Close" id="{3bfde6ae-a6cc-b5a1-5949-f60229f71e9c}">
+        <p14:section name="Close" id="{951680db-eafd-03d7-f7a3-8727175d21d3}">
           <p14:sldIdLst>
             <p14:sldId id="269"/>
           </p14:sldIdLst>
         </p14:section>
-        <p14:section name="Answers" id="{98729c79-18c1-bbcc-e311-555055228d61}">
+        <p14:section name="Answers" id="{fcb9528d-48c8-4da9-9235-a3ff825466bf}">
           <p14:sldIdLst>
             <p14:sldId id="270"/>
             <p14:sldId id="271"/>
@@ -1049,7 +1049,7 @@
               <a:rPr lang="en-US" dirty="0"/>
               <a:t>Exit ticket — individual, silent, on a slip or mini-whiteboard. Recall before help: no notes, no lanes, no hints. Collect before pupils leave.
 Question: Which command word asks you to give reasons for something?
-Answer: D   Explain. 'Explain' wants reasons, linked with words such as because and so. 'Describe' wants what happens, without reasons.
+Answer: C   Explain. 'Explain' wants reasons, linked with words such as because and so. 'Describe' wants what happens, without reasons.
 Source of this question: gate item 1 re-asked (options rotated) — this chapter has no third quick-check module.
 The ebook also holds task 3, "Staying in orbit (6 marks, Higher)", for homework or the next lesson's do now.
 Sort the slips: correct → ready to move on; incorrect → start next lesson in the pre-teach group, with the read-along and the Support lane. Same destination next time.</a:t>
@@ -1513,7 +1513,7 @@
             <a:r>
               <a:rPr lang="en-US" dirty="0"/>
               <a:t>Answers — exit ticket: Exit ticket. Reveal the answer; pupils mark their own work in a different colour, then read the "why" together. Same destination for every lane, so one answer serves the whole class.
-Answer: D   Explain
+Answer: C   Explain
 Why: 'Explain' wants reasons, linked with words such as because and so. 'Describe' wants what happens, without reasons.
 Ask a Support pupil to explain one step, and a Stretch pupil to share their extension.</a:t>
             </a:r>
@@ -1604,9 +1604,9 @@
             <a:r>
               <a:rPr lang="en-US" dirty="0"/>
               <a:t>Do now — retrieval. Silent, no notes, no help: recall comes before any support. Give about four minutes.
-1. Which command word asks you to give reasons for something?  →  A   Explain
+1. Which command word asks you to give reasons for something?  →  D   Explain
 2. In a 'compare' question you must say what is the same and what is ___.  →  different
-3. How are 6-mark answers marked?  →  A   On the quality of the whole answer, using levels
+3. How are 6-mark answers marked?  →  D   On the quality of the whole answer, using levels
 Circulate: who gets 3/3 (Stretch route), 2/3 (Core), 0–1 (Support)? Use this to route pupils later in the lesson.</a:t>
             </a:r>
             <a:endParaRPr lang="en-US" dirty="0"/>
@@ -1696,9 +1696,9 @@
             <a:r>
               <a:rPr lang="en-US" dirty="0"/>
               <a:t>Answers — pupils mark their own in a different colour, then hands up for 3/3, 2/3, 1/3.
-1. A   Explain. 'Explain' wants reasons, linked with words such as because and so. 'Describe' wants what happens, without reasons.
+1. D   Explain. 'Explain' wants reasons, linked with words such as because and so. 'Describe' wants what happens, without reasons.
 2. different. Comparing means giving similarities and differences side by side.
-3. A   On the quality of the whole answer, using levels. They are marked by levels of response: the examiner judges the whole answer for detail, accuracy and logic.
+3. D   On the quality of the whole answer, using levels. They are marked by levels of response: the examiner judges the whole answer for detail, accuracy and logic.
 Say the route each score points to: 3/3 Stretch, 2/3 Core, 0–1 Support. Pupils may choose to move up.</a:t>
             </a:r>
             <a:endParaRPr lang="en-US" dirty="0"/>
@@ -7052,7 +7052,7 @@
                 <a:ea typeface="Calibri" pitchFamily="34" charset="-122"/>
                 <a:cs typeface="Calibri" pitchFamily="34" charset="-120"/>
               </a:rPr>
-              <a:t>Describe</a:t>
+              <a:t>Name</a:t>
             </a:r>
             <a:endParaRPr lang="en-US" sz="2400" dirty="0"/>
           </a:p>
@@ -7089,7 +7089,7 @@
                 <a:ea typeface="Calibri" pitchFamily="34" charset="-122"/>
                 <a:cs typeface="Calibri" pitchFamily="34" charset="-120"/>
               </a:rPr>
-              <a:t>Name</a:t>
+              <a:t>Describe</a:t>
             </a:r>
             <a:endParaRPr lang="en-US" sz="2400" dirty="0"/>
           </a:p>
@@ -7126,7 +7126,7 @@
                 <a:ea typeface="Calibri" pitchFamily="34" charset="-122"/>
                 <a:cs typeface="Calibri" pitchFamily="34" charset="-120"/>
               </a:rPr>
-              <a:t>State</a:t>
+              <a:t>Explain</a:t>
             </a:r>
             <a:endParaRPr lang="en-US" sz="2400" dirty="0"/>
           </a:p>
@@ -7163,7 +7163,7 @@
                 <a:ea typeface="Calibri" pitchFamily="34" charset="-122"/>
                 <a:cs typeface="Calibri" pitchFamily="34" charset="-120"/>
               </a:rPr>
-              <a:t>Explain</a:t>
+              <a:t>State</a:t>
             </a:r>
             <a:endParaRPr lang="en-US" sz="2400" dirty="0"/>
           </a:p>
@@ -9736,7 +9736,7 @@
                 <a:ea typeface="Cambria" pitchFamily="34" charset="-122"/>
                 <a:cs typeface="Cambria" pitchFamily="34" charset="-120"/>
               </a:rPr>
-              <a:t>D   Explain</a:t>
+              <a:t>C   Explain</a:t>
             </a:r>
             <a:endParaRPr lang="en-US" sz="1800" dirty="0"/>
           </a:p>
@@ -10240,7 +10240,7 @@
           <a:p>
             <a:pPr algn="l" indent="0" marL="0">
               <a:spcAft>
-                <a:spcPts val="600"/>
+                <a:spcPts val="200"/>
               </a:spcAft>
               <a:buNone/>
             </a:pPr>
@@ -10257,7 +10257,7 @@
             </a:r>
             <a:pPr algn="l" indent="0" marL="0">
               <a:spcAft>
-                <a:spcPts val="600"/>
+                <a:spcPts val="200"/>
               </a:spcAft>
               <a:buNone/>
             </a:pPr>
@@ -10270,118 +10270,118 @@
                 <a:ea typeface="Calibri" pitchFamily="34" charset="-122"/>
                 <a:cs typeface="Calibri" pitchFamily="34" charset="-120"/>
               </a:rPr>
+              <a:t>State</a:t>
+            </a:r>
+            <a:endParaRPr lang="en-US" sz="2400" dirty="0"/>
+          </a:p>
+          <a:p>
+            <a:pPr algn="l" indent="0" marL="0">
+              <a:spcAft>
+                <a:spcPts val="200"/>
+              </a:spcAft>
+              <a:buNone/>
+            </a:pPr>
+            <a:r>
+              <a:rPr lang="en-US" sz="2400" b="1" dirty="0">
+                <a:solidFill>
+                  <a:srgbClr val="B8862B"/>
+                </a:solidFill>
+                <a:latin typeface="Calibri" pitchFamily="34" charset="0"/>
+                <a:ea typeface="Calibri" pitchFamily="34" charset="-122"/>
+                <a:cs typeface="Calibri" pitchFamily="34" charset="-120"/>
+              </a:rPr>
+              <a:t>B   </a:t>
+            </a:r>
+            <a:pPr algn="l" indent="0" marL="0">
+              <a:spcAft>
+                <a:spcPts val="200"/>
+              </a:spcAft>
+              <a:buNone/>
+            </a:pPr>
+            <a:r>
+              <a:rPr lang="en-US" sz="2400" dirty="0">
+                <a:solidFill>
+                  <a:srgbClr val="1E2229"/>
+                </a:solidFill>
+                <a:latin typeface="Calibri" pitchFamily="34" charset="0"/>
+                <a:ea typeface="Calibri" pitchFamily="34" charset="-122"/>
+                <a:cs typeface="Calibri" pitchFamily="34" charset="-120"/>
+              </a:rPr>
+              <a:t>Name</a:t>
+            </a:r>
+            <a:endParaRPr lang="en-US" sz="2400" dirty="0"/>
+          </a:p>
+          <a:p>
+            <a:pPr algn="l" indent="0" marL="0">
+              <a:spcAft>
+                <a:spcPts val="200"/>
+              </a:spcAft>
+              <a:buNone/>
+            </a:pPr>
+            <a:r>
+              <a:rPr lang="en-US" sz="2400" b="1" dirty="0">
+                <a:solidFill>
+                  <a:srgbClr val="B8862B"/>
+                </a:solidFill>
+                <a:latin typeface="Calibri" pitchFamily="34" charset="0"/>
+                <a:ea typeface="Calibri" pitchFamily="34" charset="-122"/>
+                <a:cs typeface="Calibri" pitchFamily="34" charset="-120"/>
+              </a:rPr>
+              <a:t>C   </a:t>
+            </a:r>
+            <a:pPr algn="l" indent="0" marL="0">
+              <a:spcAft>
+                <a:spcPts val="200"/>
+              </a:spcAft>
+              <a:buNone/>
+            </a:pPr>
+            <a:r>
+              <a:rPr lang="en-US" sz="2400" dirty="0">
+                <a:solidFill>
+                  <a:srgbClr val="1E2229"/>
+                </a:solidFill>
+                <a:latin typeface="Calibri" pitchFamily="34" charset="0"/>
+                <a:ea typeface="Calibri" pitchFamily="34" charset="-122"/>
+                <a:cs typeface="Calibri" pitchFamily="34" charset="-120"/>
+              </a:rPr>
+              <a:t>Describe</a:t>
+            </a:r>
+            <a:endParaRPr lang="en-US" sz="2400" dirty="0"/>
+          </a:p>
+          <a:p>
+            <a:pPr algn="l" indent="0" marL="0">
+              <a:spcAft>
+                <a:spcPts val="200"/>
+              </a:spcAft>
+              <a:buNone/>
+            </a:pPr>
+            <a:r>
+              <a:rPr lang="en-US" sz="2400" b="1" dirty="0">
+                <a:solidFill>
+                  <a:srgbClr val="B8862B"/>
+                </a:solidFill>
+                <a:latin typeface="Calibri" pitchFamily="34" charset="0"/>
+                <a:ea typeface="Calibri" pitchFamily="34" charset="-122"/>
+                <a:cs typeface="Calibri" pitchFamily="34" charset="-120"/>
+              </a:rPr>
+              <a:t>D   </a:t>
+            </a:r>
+            <a:pPr algn="l" indent="0" marL="0">
+              <a:spcAft>
+                <a:spcPts val="200"/>
+              </a:spcAft>
+              <a:buNone/>
+            </a:pPr>
+            <a:r>
+              <a:rPr lang="en-US" sz="2400" dirty="0">
+                <a:solidFill>
+                  <a:srgbClr val="1E2229"/>
+                </a:solidFill>
+                <a:latin typeface="Calibri" pitchFamily="34" charset="0"/>
+                <a:ea typeface="Calibri" pitchFamily="34" charset="-122"/>
+                <a:cs typeface="Calibri" pitchFamily="34" charset="-120"/>
+              </a:rPr>
               <a:t>Explain</a:t>
-            </a:r>
-            <a:endParaRPr lang="en-US" sz="2400" dirty="0"/>
-          </a:p>
-          <a:p>
-            <a:pPr algn="l" indent="0" marL="0">
-              <a:spcAft>
-                <a:spcPts val="600"/>
-              </a:spcAft>
-              <a:buNone/>
-            </a:pPr>
-            <a:r>
-              <a:rPr lang="en-US" sz="2400" b="1" dirty="0">
-                <a:solidFill>
-                  <a:srgbClr val="B8862B"/>
-                </a:solidFill>
-                <a:latin typeface="Calibri" pitchFamily="34" charset="0"/>
-                <a:ea typeface="Calibri" pitchFamily="34" charset="-122"/>
-                <a:cs typeface="Calibri" pitchFamily="34" charset="-120"/>
-              </a:rPr>
-              <a:t>B   </a:t>
-            </a:r>
-            <a:pPr algn="l" indent="0" marL="0">
-              <a:spcAft>
-                <a:spcPts val="600"/>
-              </a:spcAft>
-              <a:buNone/>
-            </a:pPr>
-            <a:r>
-              <a:rPr lang="en-US" sz="2400" dirty="0">
-                <a:solidFill>
-                  <a:srgbClr val="1E2229"/>
-                </a:solidFill>
-                <a:latin typeface="Calibri" pitchFamily="34" charset="0"/>
-                <a:ea typeface="Calibri" pitchFamily="34" charset="-122"/>
-                <a:cs typeface="Calibri" pitchFamily="34" charset="-120"/>
-              </a:rPr>
-              <a:t>Describe</a:t>
-            </a:r>
-            <a:endParaRPr lang="en-US" sz="2400" dirty="0"/>
-          </a:p>
-          <a:p>
-            <a:pPr algn="l" indent="0" marL="0">
-              <a:spcAft>
-                <a:spcPts val="600"/>
-              </a:spcAft>
-              <a:buNone/>
-            </a:pPr>
-            <a:r>
-              <a:rPr lang="en-US" sz="2400" b="1" dirty="0">
-                <a:solidFill>
-                  <a:srgbClr val="B8862B"/>
-                </a:solidFill>
-                <a:latin typeface="Calibri" pitchFamily="34" charset="0"/>
-                <a:ea typeface="Calibri" pitchFamily="34" charset="-122"/>
-                <a:cs typeface="Calibri" pitchFamily="34" charset="-120"/>
-              </a:rPr>
-              <a:t>C   </a:t>
-            </a:r>
-            <a:pPr algn="l" indent="0" marL="0">
-              <a:spcAft>
-                <a:spcPts val="600"/>
-              </a:spcAft>
-              <a:buNone/>
-            </a:pPr>
-            <a:r>
-              <a:rPr lang="en-US" sz="2400" dirty="0">
-                <a:solidFill>
-                  <a:srgbClr val="1E2229"/>
-                </a:solidFill>
-                <a:latin typeface="Calibri" pitchFamily="34" charset="0"/>
-                <a:ea typeface="Calibri" pitchFamily="34" charset="-122"/>
-                <a:cs typeface="Calibri" pitchFamily="34" charset="-120"/>
-              </a:rPr>
-              <a:t>Name</a:t>
-            </a:r>
-            <a:endParaRPr lang="en-US" sz="2400" dirty="0"/>
-          </a:p>
-          <a:p>
-            <a:pPr algn="l" indent="0" marL="0">
-              <a:spcAft>
-                <a:spcPts val="600"/>
-              </a:spcAft>
-              <a:buNone/>
-            </a:pPr>
-            <a:r>
-              <a:rPr lang="en-US" sz="2400" b="1" dirty="0">
-                <a:solidFill>
-                  <a:srgbClr val="B8862B"/>
-                </a:solidFill>
-                <a:latin typeface="Calibri" pitchFamily="34" charset="0"/>
-                <a:ea typeface="Calibri" pitchFamily="34" charset="-122"/>
-                <a:cs typeface="Calibri" pitchFamily="34" charset="-120"/>
-              </a:rPr>
-              <a:t>D   </a:t>
-            </a:r>
-            <a:pPr algn="l" indent="0" marL="0">
-              <a:spcAft>
-                <a:spcPts val="600"/>
-              </a:spcAft>
-              <a:buNone/>
-            </a:pPr>
-            <a:r>
-              <a:rPr lang="en-US" sz="2400" dirty="0">
-                <a:solidFill>
-                  <a:srgbClr val="1E2229"/>
-                </a:solidFill>
-                <a:latin typeface="Calibri" pitchFamily="34" charset="0"/>
-                <a:ea typeface="Calibri" pitchFamily="34" charset="-122"/>
-                <a:cs typeface="Calibri" pitchFamily="34" charset="-120"/>
-              </a:rPr>
-              <a:t>State</a:t>
             </a:r>
             <a:endParaRPr lang="en-US" sz="2400" dirty="0"/>
           </a:p>
@@ -10783,7 +10783,7 @@
                 <a:ea typeface="Calibri" pitchFamily="34" charset="-122"/>
                 <a:cs typeface="Calibri" pitchFamily="34" charset="-120"/>
               </a:rPr>
-              <a:t>On the quality of the whole answer, using levels</a:t>
+              <a:t>Only on the final sentence</a:t>
             </a:r>
             <a:endParaRPr lang="en-US" sz="2000" dirty="0"/>
           </a:p>
@@ -10894,7 +10894,7 @@
                 <a:ea typeface="Calibri" pitchFamily="34" charset="-122"/>
                 <a:cs typeface="Calibri" pitchFamily="34" charset="-120"/>
               </a:rPr>
-              <a:t>Only on the final sentence</a:t>
+              <a:t>On the quality of the whole answer, using levels</a:t>
             </a:r>
             <a:endParaRPr lang="en-US" sz="2000" dirty="0"/>
           </a:p>
@@ -11295,7 +11295,7 @@
                 <a:ea typeface="Calibri" pitchFamily="34" charset="-122"/>
                 <a:cs typeface="Calibri" pitchFamily="34" charset="-120"/>
               </a:rPr>
-              <a:t>A   Explain</a:t>
+              <a:t>D   Explain</a:t>
             </a:r>
             <a:endParaRPr lang="en-US" sz="2200" dirty="0"/>
           </a:p>
@@ -11795,7 +11795,7 @@
                 <a:ea typeface="Calibri" pitchFamily="34" charset="-122"/>
                 <a:cs typeface="Calibri" pitchFamily="34" charset="-120"/>
               </a:rPr>
-              <a:t>A   On the quality of the whole answer, using levels</a:t>
+              <a:t>D   On the quality of the whole answer, using levels</a:t>
             </a:r>
             <a:endParaRPr lang="en-US" sz="2200" dirty="0"/>
           </a:p>

--- a/decks/triple-space/triple-space_ch5_exam-skills.pptx
+++ b/decks/triple-space/triple-space_ch5_exam-skills.pptx
@@ -125,28 +125,28 @@
   <p:extLst>
     <p:ext uri="{521415D9-36F7-43E2-AB2F-B90AF26B5E84}">
       <p14:sectionLst xmlns:p14="http://schemas.microsoft.com/office/powerpoint/2010/main">
-        <p14:section name="Opening" id="{36145714-412b-3a4e-d714-4db0054ce224}">
+        <p14:section name="Opening" id="{4e9f41ff-1867-6f54-6ac0-92e3df05bb90}">
           <p14:sldIdLst>
             <p14:sldId id="256"/>
           </p14:sldIdLst>
         </p14:section>
-        <p14:section name="Gate" id="{67b1d78e-7a6b-09d4-294f-addf40f306f9}">
+        <p14:section name="Gate" id="{2a751a24-967e-efda-344a-f0cca413b45e}">
           <p14:sldIdLst>
             <p14:sldId id="257"/>
             <p14:sldId id="258"/>
           </p14:sldIdLst>
         </p14:section>
-        <p14:section name="Pre-teach" id="{92d7c1e3-fb2f-d7bc-b8ee-3ab631e195fb}">
+        <p14:section name="Pre-teach" id="{668455ef-c46f-c851-a6b8-7dcb6a61bd80}">
           <p14:sldIdLst>
             <p14:sldId id="259"/>
           </p14:sldIdLst>
         </p14:section>
-        <p14:section name="Read-along" id="{2154be09-aa08-3de5-1d61-cef123346421}">
+        <p14:section name="Read-along" id="{917523cf-df25-434a-55e7-3a3715a49f40}">
           <p14:sldIdLst>
             <p14:sldId id="260"/>
           </p14:sldIdLst>
         </p14:section>
-        <p14:section name="Teach" id="{f3894346-1bb0-b796-fb68-9f2f2d697768}">
+        <p14:section name="Teach" id="{8ee764c0-6d5d-ae5e-97cf-8605270006d0}">
           <p14:sldIdLst>
             <p14:sldId id="261"/>
             <p14:sldId id="262"/>
@@ -154,7 +154,7 @@
             <p14:sldId id="264"/>
           </p14:sldIdLst>
         </p14:section>
-        <p14:section name="Routes" id="{310b65d8-589b-3d42-6216-deafb5e85a97}">
+        <p14:section name="Routes" id="{7c1c80c3-0ff0-207a-6bb8-1c91c8eadc5f}">
           <p14:sldIdLst>
             <p14:sldId id="265"/>
             <p14:sldId id="266"/>
@@ -162,12 +162,12 @@
             <p14:sldId id="268"/>
           </p14:sldIdLst>
         </p14:section>
-        <p14:section name="Close" id="{951680db-eafd-03d7-f7a3-8727175d21d3}">
+        <p14:section name="Close" id="{c13c5cb5-0762-061a-1dfa-dad0bc50d20e}">
           <p14:sldIdLst>
             <p14:sldId id="269"/>
           </p14:sldIdLst>
         </p14:section>
-        <p14:section name="Answers" id="{fcb9528d-48c8-4da9-9235-a3ff825466bf}">
+        <p14:section name="Answers" id="{98e913e7-4ee4-5672-6a31-615e13303f4e}">
           <p14:sldIdLst>
             <p14:sldId id="270"/>
             <p14:sldId id="271"/>
